--- a/dist/weeks-대학원/컨셉트와프로세스_04주차_선행연구쓰는법.pptx
+++ b/dist/weeks-대학원/컨셉트와프로세스_04주차_선행연구쓰는법.pptx
@@ -624,11 +624,11 @@
 선행연구 절을 쓸 때입니다.
 왼쪽이 흔한 방식, 오른쪽이 쓰는 방식입니다.
 첫 줄. 왼쪽은 김, 이, 박 순서로 한 편씩 씁니다. 다섯 편이면 다섯 문단이 되겠죠. 읽는 사람은 '그래서?'라고 묻게 됩니다.
-오른쪽은 묶었습니다. 무엇을 쟀는가로 두 무리로 나눴어요.
+오른쪽은 묶었습니다. 무엇을 쟀는지로 두 묶음으로 나눴어요.
 둘째 줄. 왼쪽은 연도순입니다. 2019년부터 2024년까지 차례로. 연도순은 아무것도 설명하지 않아요.
 오른쪽은 글자를 본 넷과 색을 본 하나로 나눴습니다. 숫자가 들어갔지요. 셌다는 뜻입니다.
-셋째 줄. 왼쪽은 다섯 편을 다 소개하고 끝냅니다. 오른쪽은 '다섯 편 모두 업종은 보지 않았다'로 빈 자리를 가리켰어요.
-묶지 않으면 이 문장을 쓸 수가 없습니다. 한 편씩 보면 빈 자리가 안 보이거든요.
+셋째 줄. 왼쪽은 다섯 편을 다 소개하고 끝냅니다. 오른쪽은 '다섯 편 모두 업종은 보지 않았다'로 빠진 것을 짚었어요.
+묶지 않으면 이 문장을 쓸 수가 없습니다. 한 편씩 보면 빠진 것이 안 보이거든요.
 넷째 줄이 마지막입니다. '그래서 이 연구는 색과 업종을 본다.'
 이 문장이 없으면 선행연구 절이 떠 있게 됩니다.
 [운영 메모]
@@ -817,9 +817,9 @@
               <a:t>[말할 내용]
 인용은 세 가지 일을 합니다.
 첫째, 근거로 씁니다. 내 주장을 받쳐 주는 자리예요. '간판의 글자 크기가 가독성에 영향을 준다고 알려져 있다. 괄호 김, 2019.' 이런 식입니다.
-둘째, 빌려서 씁니다. 남의 측정 방법이나 분석 틀을 가져오는 거예요. '이 연구는 김의 측정 방법을 따른다.' 이게 제일 실용적입니다.
+둘째, 빌려서 씁니다. 남이 쓴 재는 방법을 가져오는 거예요. '이 연구는 김의 측정 방법을 따른다.' 이게 제일 쓸모가 많습니다.
 셋째, 반대해서 씁니다. 남과 다르게 보는 자리예요. '김은 글자만 보았으나 이 연구는 색을 함께 본다.'
-세 번째가 중요합니다. 이게 없으면 내 연구가 왜 필요한지 설명이 안 돼요.
+세 번째가 중요합니다. 이게 없으면 내 연구를 왜 하는지 말할 수가 없어요.
 많은 분들이 첫 번째만 씁니다. 근거로만 쓰면 내 글이 남의 말 모음이 됩니다.
 [운영 메모]
 '근거로만 쓰면 남의 말 모음이 된다'를 말할 것. 세 번째가 비어 있는 것이 두 분 과제의 공통점이다.</a:t>
@@ -1105,13 +1105,13 @@
               <a:rPr lang="en-US" dirty="0"/>
               <a:t>[말할 내용]
 네 단계입니다.
-먼저 다섯 편을 두세 무리로 나눕니다. 기준은 무엇을 쟀는가예요. 연도가 아닙니다.
-다음 무리마다 한 문장을 씁니다. 몇 편이 무엇을 다뤘는지. 숫자를 꼭 넣으세요. '여러 연구가'가 아니라 '네 편이'라고 쓰시는 겁니다.
-다음 비어 있는 자리를 한 문장으로 씁니다. 다섯 편 모두 다루지 않은 것이 무엇인지.
+먼저 다섯 편을 두세 묶음으로 나눕니다. 무엇을 쟀는지로 나누는 거예요. 연도로 나누지 않습니다.
+다음 묶음마다 한 문장을 씁니다. 몇 편이 무엇을 다뤘는지. 숫자를 꼭 넣으세요. '여러 연구가'가 아니라 '네 편이'라고 쓰시는 겁니다.
+다음 빠진 것을 한 문장으로 씁니다. 다섯 편 모두 다루지 않은 것이 무엇인지.
 이 문장을 쓰려면 아까 말씀드린 '무엇이 남았나' 칸이 채워져 있어야 합니다.
 마지막으로 내 연구를 한 문장 붙입니다. '그래서 이 연구는'으로 시작하세요.
 네 문장이면 한 문단이 됩니다. 이게 선행연구 절의 첫 문단이에요.
-나중에 편수가 늘면 무리가 늘어날 뿐 구조는 같습니다.
+나중에 편수가 늘면 묶음이 늘어날 뿐 쓰는 법은 같습니다.
 [운영 메모]
 셋째 단계에서 막히는 학생이 나온다. '무엇이 남았나' 칸이 비어 있기 때문이다. 그 경우 논문의 한계 문단을 다시 보라고 할 것.</a:t>
             </a:r>
@@ -1204,7 +1204,7 @@
               <a:t>[말할 내용]
 과제입니다.
 왼쪽 네 칸을 채우시면 한 문단이 됩니다. 방금 본 순서 그대로예요.
-무리 하나, 무리 둘, 빈 자리, 내 자리.
+묶음 하나, 묶음 둘, 빠진 것, 내 연구.
 오른쪽은 함께 내실 것입니다.
 정리표는 2회차에 만드신 것에 쪽수 칸을 더하세요. 그리고 '무엇이 남았나' 칸을 채우시고요.
 인용 문장 다섯 개는 편마다 하나씩입니다. 쪽수를 꼭 붙이세요.
@@ -1397,12 +1397,12 @@
               <a:t>[말할 내용]
 정리하겠습니다.
 과제 세 가지입니다.
-먼저 선행연구 한 문단. 오늘 본 네 칸을 이으시면 됩니다. 무리 하나, 무리 둘, 빈 자리, 내 자리.
+먼저 선행연구 한 문단. 오늘 본 네 칸을 이으시면 됩니다. 묶음 하나, 묶음 둘, 빠진 것, 내 연구.
 열 줄 안쪽이면 충분합니다. 길게 쓰려고 하지 마세요.
 둘째, 인용 문장 다섯 개. 편마다 하나씩이고 쪽수를 꼭 붙이세요.
 나중에 논문 쓸 때 쪽수를 다시 찾는 일이 제일 고통스럽습니다. 지금 적어 두시면 그 일을 안 하셔도 됩니다.
 셋째, 정리표 보완입니다. 2회차에 만드신 표에 쪽수 칸을 더하시고, '무엇이 남았나' 칸을 채우세요.
-이 칸을 꼭 채우셔야 합니다. 여기가 비어 있으면 내 연구가 설 자리를 찾을 수 없어요.
+이 칸을 꼭 채우셔야 합니다. 여기가 비어 있으면 내가 무엇을 할지 찾을 수 없어요.
 한 가지 말씀드릴게요.
 다섯 편이 다 안 모이셨어도 세 편으로 먼저 해 보세요. 세 편으로 한 문단을 써 보면 나머지 두 편을 왜 찾아야 하는지 알게 됩니다.
 아무것도 안 내시는 것보다 세 편이 낫습니다.
@@ -1601,7 +1601,7 @@
 두 번째에서 멈추면 정리표만 생깁니다. 지난번에 만드신 그 표요. 표는 있는데 글은 없는 상태입니다.
 지금 두 분이 여기 계십니다.
 세 번째까지 가야 논문이 됩니다. 표의 내용이 문장이 되는 거예요.
-오늘은 두 번째에서 세 번째로 넘어가는 자리입니다.
+오늘은 두 번째에서 세 번째로 넘어가는 시간입니다.
 [운영 메모]
 '지금 두 분이 두 번째에 계십니다'를 말할 것. 비난이 아니라 위치 확인이다. 대부분의 대학원생이 여기서 멈춘다는 사실도 함께 말하면 안심한다.</a:t>
             </a:r>
@@ -1788,12 +1788,12 @@
               <a:t>[말할 내용]
 네 가지입니다.
 먼저 무엇을 물었나. 그 논문의 연구 질문이에요. 초록에 있고 서론 끝에 다시 나옵니다.
-다음 무엇으로 쟀나. 측정 도구나 분석 틀입니다. 이게 제일 쓸모 있어요. 내가 빌려 쓸 수 있는 자리거든요.
-설문 문항을 그대로 가져다 쓰실 수도 있습니다. 이미 검증된 문항이니까 새로 만드는 것보다 낫습니다.
-다음 몇 개를 봤나. 표본 수와 대상이요. 내 연구를 몇 개로 할지 정할 때 근거가 됩니다. '선행연구가 40점을 봤으니 나도 그 정도면 된다' 이렇게 쓸 수 있어요.
+다음 무엇으로 쟀나. 그 사람이 어떤 방법으로 쟀는지입니다. 이게 제일 쓸모 있어요. 내가 빌려 쓸 수 있는 자리거든요.
+설문 문항을 그대로 가져다 쓰실 수도 있습니다. 여러 연구가 써 온 문항이니까 새로 만드는 것보다 낫습니다.
+다음 몇 개를 봤나. 몇 개를 봤고 누구한테 물었는지요. 내 연구를 몇 개로 할지 정할 때 근거가 됩니다. '선행연구가 40점을 봤으니 나도 그 정도면 된다' 이렇게 쓸 수 있어요.
 마지막이 제일 중요합니다. 무엇이 남았나.
 그 논문이 못 한 것입니다. 결론 끝에 보면 '본 연구의 한계는' 하는 문단이 있어요. 거기 적혀 있습니다.
-남이 못 한 자리가 내 연구가 설 자리입니다. 이 칸이 비어 있으면 내 연구가 왜 필요한지 쓸 수 없어요.
+남이 못 한 것이 내가 할 일입니다. 이 칸이 비어 있으면 내 연구가 왜 필요한지 쓸 수 없어요.
 [운영 메모]
 둘째와 넷째에 시간을 쓸 것. 둘째는 '새로 만들지 않아도 된다'는 안도를 주고, 넷째는 연구의 필요성이 나오는 자리다. 한계 문단을 찾는 법을 실제 논문으로 한 번 보여 주면 좋다.</a:t>
             </a:r>
@@ -1888,10 +1888,10 @@
 왼쪽이 논문에 쓰여 있는 것이에요. 제목, 방법, 결과, 한계.
 이걸 그대로 옮겨 적으면 소개가 됩니다. 소개는 내 글에 쓸 수 없어요.
 오른쪽이 꺼낸 것입니다.
-물었나 — 글자 크기가 읽는 속도에 영향을 주는가. 질문 형태로 바꿨습니다.
+물었나 — 글자가 크면 더 빨리 읽나. 질문 형태로 바꿨습니다.
 쟀나 — 사진을 보여 주고 읽기까지 걸린 시간을 초로 쟀습니다. 내 연구에서도 이 방법을 쓸 수 있어요.
 봤나 — 방문객 40명. 그런데 사진이 몇 장인지는 안 적혀 있습니다. 이것도 적어 두세요. 없는 것을 아는 것도 정보입니다.
-남았나 — 업종 구별을 못 했다고 그 논문이 직접 적어 놨습니다. 여기가 내가 들어갈 자리예요.
+남았나 — 업종 구별을 못 했다고 그 논문이 직접 적어 놨습니다. 여기가 내가 할 일이에요.
 같은 논문인데 왼쪽은 남의 것이고 오른쪽은 제 재료가 됐습니다.
 [운영 메모]
 '사진 장수가 적혀 있지 않다'를 짚을 것. 없는 것을 적어 두는 습관이 나중에 자기 논문을 쓸 때 돌아온다. 오른쪽 넷째 줄에서 '여기가 내 자리'를 분명히 말한다.</a:t>
@@ -1990,7 +1990,7 @@
 둘째 줄. 쪽수입니다. 왼쪽은 '김○○(2019) 참조'로 끝냈어요. 오른쪽은 45쪽까지 적었습니다.
 쪽수를 지금 안 적으면 나중에 논문 전체를 다시 뒤지셔야 합니다. 이게 정말 고통스러운 일이에요.
 셋째 줄. 왼쪽은 '~라고 하였다'로 끝납니다. 남의 말만 있고 내 판단이 없어요. 오른쪽은 '~라고 했으나 업종은 보지 않았다'로 내 판단을 붙였습니다.
-넷째 줄. 왼쪽은 요약만 있고 그걸 어디에 쓸지가 없습니다. 오른쪽은 '이 측정 방법을 내 연구에 빌린다'고 적었어요.
+넷째 줄. 왼쪽은 요약만 있고 그걸 어디에 쓸지가 없습니다. 오른쪽은 '이 방법을 내 연구에 빌린다'고 적었어요.
 이 한 줄이 있으면 나중에 방법 절을 쓸 때 바로 꺼내 쓸 수 있습니다.
 [운영 메모]
 둘째 줄(쪽수)을 강조할 것. 이 한 칸이 나중에 집필 시간을 가장 많이 줄인다. 넷째 줄은 2회차 정리표의 다섯째 칸과 같은 자리다.</a:t>
@@ -2176,7 +2176,7 @@
               <a:rPr lang="en-US" dirty="0"/>
               <a:t>[말할 내용]
 하나씩 보겠습니다.
-'무엇이 남았나'는 문제 세우기로 갑니다. 남이 못 한 자리에서 내 문제가 나오니까요.
+'무엇이 남았나'는 문제 세우기로 갑니다. 남이 못 한 것에서 내 문제가 나오니까요.
 '무엇을 물었나'는 연구 질문으로 갑니다. 남의 질문 옆에 내 질문을 놓는 거예요. 그래야 내 질문이 새로운지 보입니다.
 꺼낸 것 전부가 선행연구 절로 갑니다. 여기는 뒤에서 따로 보겠습니다.
 '무엇으로 쟀나'와 '몇 개를 봤나'는 연구 방법으로 갑니다.
@@ -2924,7 +2924,7 @@
                 <a:ea typeface="Pretendard Light" pitchFamily="34" charset="-122"/>
                 <a:cs typeface="Pretendard Light" pitchFamily="34" charset="-120"/>
               </a:rPr>
-              <a:t>논문 한 편에서 네 가지를 꺼내고,</a:t>
+              <a:t>논문 한 편에서 무엇을 꺼낼지 보고,</a:t>
             </a:r>
             <a:endParaRPr lang="en-US" sz="1600" dirty="0"/>
           </a:p>
@@ -3203,7 +3203,7 @@
                 <a:ea typeface="Pretendard" pitchFamily="34" charset="-122"/>
                 <a:cs typeface="Pretendard" pitchFamily="34" charset="-120"/>
               </a:rPr>
-              <a:t>선행연구 한 문단 · 인용 문장 다섯 개 · 정리표 보완본</a:t>
+              <a:t>선행연구 한 문단 · 인용 문장 다섯 개 · 정리표 고친 것</a:t>
             </a:r>
             <a:endParaRPr lang="en-US" sz="1200" dirty="0"/>
           </a:p>
@@ -3636,7 +3636,7 @@
                 <a:ea typeface="Pretendard" pitchFamily="34" charset="-122"/>
                 <a:cs typeface="Pretendard" pitchFamily="34" charset="-120"/>
               </a:rPr>
-              <a:t>묶는 기준은 연도가 아니라 무엇을 쟀는가입니다.</a:t>
+              <a:t>연도로 묶지 않습니다. 무엇을 쟀는지로 묶습니다.</a:t>
             </a:r>
             <a:endParaRPr lang="en-US" sz="1150" dirty="0"/>
           </a:p>
@@ -3828,7 +3828,7 @@
                 <a:ea typeface="Pretendard" pitchFamily="34" charset="-122"/>
                 <a:cs typeface="Pretendard" pitchFamily="34" charset="-120"/>
               </a:rPr>
-              <a:t>묶는 기준 없음</a:t>
+              <a:t>묶지 않음</a:t>
             </a:r>
             <a:endParaRPr lang="en-US" sz="900" dirty="0"/>
           </a:p>
@@ -3909,7 +3909,7 @@
                 <a:ea typeface="Pretendard" pitchFamily="34" charset="-122"/>
                 <a:cs typeface="Pretendard" pitchFamily="34" charset="-120"/>
               </a:rPr>
-              <a:t>묶는 기준 없음</a:t>
+              <a:t>묶지 않음</a:t>
             </a:r>
             <a:endParaRPr lang="en-US" sz="900" dirty="0"/>
           </a:p>
@@ -3951,7 +3951,7 @@
                 <a:ea typeface="Pretendard" pitchFamily="34" charset="-122"/>
                 <a:cs typeface="Pretendard" pitchFamily="34" charset="-120"/>
               </a:rPr>
-              <a:t>무엇을 쟀는가로 두 무리로 나눔</a:t>
+              <a:t>무엇을 쟀는지로 두 묶음으로</a:t>
             </a:r>
             <a:endParaRPr lang="en-US" sz="1150" dirty="0"/>
           </a:p>
@@ -4252,7 +4252,7 @@
                 <a:ea typeface="Pretendard" pitchFamily="34" charset="-122"/>
                 <a:cs typeface="Pretendard" pitchFamily="34" charset="-120"/>
               </a:rPr>
-              <a:t>빈 자리 안 보임</a:t>
+              <a:t>빠진 것이 안 보임</a:t>
             </a:r>
             <a:endParaRPr lang="en-US" sz="900" dirty="0"/>
           </a:p>
@@ -4333,7 +4333,7 @@
                 <a:ea typeface="Pretendard" pitchFamily="34" charset="-122"/>
                 <a:cs typeface="Pretendard" pitchFamily="34" charset="-120"/>
               </a:rPr>
-              <a:t>빈 자리 안 보임</a:t>
+              <a:t>빠진 것이 안 보임</a:t>
             </a:r>
             <a:endParaRPr lang="en-US" sz="900" dirty="0"/>
           </a:p>
@@ -4654,7 +4654,7 @@
                 <a:ea typeface="Pretendard" pitchFamily="34" charset="-122"/>
                 <a:cs typeface="Pretendard" pitchFamily="34" charset="-120"/>
               </a:rPr>
-              <a:t>기준이 있어야 빈 자리가 보입니다. 한 편씩 보면 무엇이 비었는지 알 수 없습니다.</a:t>
+              <a:t>묶어야 빠진 것이 보입니다. 한 편씩 보면 무엇이 빠졌는지 알 수 없습니다.</a:t>
             </a:r>
             <a:endParaRPr lang="en-US" sz="1300" dirty="0"/>
           </a:p>
@@ -5514,7 +5514,7 @@
                 <a:ea typeface="Pretendard" pitchFamily="34" charset="-122"/>
                 <a:cs typeface="Pretendard" pitchFamily="34" charset="-120"/>
               </a:rPr>
-              <a:t>세 번째가 비어 있으면 내 연구가 왜 필요한지 설명되지 않습니다.</a:t>
+              <a:t>세 번째가 없으면 내 연구를 왜 하는지 말할 수 없습니다.</a:t>
             </a:r>
             <a:endParaRPr lang="en-US" sz="1150" dirty="0"/>
           </a:p>
@@ -5687,7 +5687,7 @@
                 <a:ea typeface="Pretendard" pitchFamily="34" charset="-122"/>
                 <a:cs typeface="Pretendard" pitchFamily="34" charset="-120"/>
               </a:rPr>
-              <a:t>내 주장을 받쳐 주는 자리입니다. 이미 알려진 사실을 가져옵니다.</a:t>
+              <a:t>내 말을 받쳐 줍니다. 이미 알려진 것을 가져옵니다.</a:t>
             </a:r>
             <a:endParaRPr lang="en-US" sz="1150" dirty="0"/>
           </a:p>
@@ -5938,7 +5938,7 @@
                 <a:ea typeface="Pretendard" pitchFamily="34" charset="-122"/>
                 <a:cs typeface="Pretendard" pitchFamily="34" charset="-120"/>
               </a:rPr>
-              <a:t>남의 측정 방법이나 분석 틀을 가져옵니다. 가장 실용적인 쓰임입니다.</a:t>
+              <a:t>남이 쓴 재는 방법을 가져옵니다. 제일 쓸모가 많습니다.</a:t>
             </a:r>
             <a:endParaRPr lang="en-US" sz="1150" dirty="0"/>
           </a:p>
@@ -6016,7 +6016,7 @@
                 <a:ea typeface="Pretendard SemiBold" pitchFamily="34" charset="-122"/>
                 <a:cs typeface="Pretendard SemiBold" pitchFamily="34" charset="-120"/>
               </a:rPr>
-              <a:t>김(2019)의 측정을 따른다</a:t>
+              <a:t>김(2019)이 쓴 방법을 따른다</a:t>
             </a:r>
             <a:endParaRPr lang="en-US" sz="1200" dirty="0"/>
           </a:p>
@@ -6189,7 +6189,7 @@
                 <a:ea typeface="Pretendard" pitchFamily="34" charset="-122"/>
                 <a:cs typeface="Pretendard" pitchFamily="34" charset="-120"/>
               </a:rPr>
-              <a:t>남과 다르게 보는 자리입니다. 내 연구의 필요성이 여기서 나옵니다.</a:t>
+              <a:t>남과 다르게 봅니다. 내 연구를 왜 하는지가 여기서 나옵니다.</a:t>
             </a:r>
             <a:endParaRPr lang="en-US" sz="1150" dirty="0"/>
           </a:p>
@@ -6622,7 +6622,7 @@
                 <a:ea typeface="Pretendard SemiBold" pitchFamily="34" charset="-122"/>
                 <a:cs typeface="Pretendard SemiBold" pitchFamily="34" charset="-120"/>
               </a:rPr>
-              <a:t>인용과 표절의 경계</a:t>
+              <a:t>인용과 표절의 차이</a:t>
             </a:r>
             <a:endParaRPr lang="en-US" sz="3000" dirty="0"/>
           </a:p>
@@ -6895,7 +6895,7 @@
                 <a:ea typeface="Pretendard" pitchFamily="34" charset="-122"/>
                 <a:cs typeface="Pretendard" pitchFamily="34" charset="-120"/>
               </a:rPr>
-              <a:t>남의 문장을 출처 없이 씀</a:t>
+              <a:t>남의 문장을 출처 없이 쓴다</a:t>
             </a:r>
             <a:endParaRPr lang="en-US" sz="1150" dirty="0"/>
           </a:p>
@@ -6976,7 +6976,7 @@
                 <a:ea typeface="Pretendard" pitchFamily="34" charset="-122"/>
                 <a:cs typeface="Pretendard" pitchFamily="34" charset="-120"/>
               </a:rPr>
-              <a:t>문장 끝에 (저자, 연도)를 붙임</a:t>
+              <a:t>문장 끝에 (저자, 연도)를 붙인다</a:t>
             </a:r>
             <a:endParaRPr lang="en-US" sz="1150" dirty="0"/>
           </a:p>
@@ -7107,7 +7107,7 @@
                 <a:ea typeface="Pretendard" pitchFamily="34" charset="-122"/>
                 <a:cs typeface="Pretendard" pitchFamily="34" charset="-120"/>
               </a:rPr>
-              <a:t>원문 그대로인데 표시가 없음</a:t>
+              <a:t>그대로 옮겼는데 표시가 없다</a:t>
             </a:r>
             <a:endParaRPr lang="en-US" sz="1150" dirty="0"/>
           </a:p>
@@ -7188,7 +7188,7 @@
                 <a:ea typeface="Pretendard" pitchFamily="34" charset="-122"/>
                 <a:cs typeface="Pretendard" pitchFamily="34" charset="-120"/>
               </a:rPr>
-              <a:t>따옴표와 쪽수를 함께 넣음</a:t>
+              <a:t>따옴표와 쪽수를 함께 넣는다</a:t>
             </a:r>
             <a:endParaRPr lang="en-US" sz="1150" dirty="0"/>
           </a:p>
@@ -7277,7 +7277,7 @@
                 <a:ea typeface="Pretendard" pitchFamily="34" charset="-122"/>
                 <a:cs typeface="Pretendard" pitchFamily="34" charset="-120"/>
               </a:rPr>
-              <a:t>짜깁기</a:t>
+              <a:t>이어 붙이기</a:t>
             </a:r>
             <a:endParaRPr lang="en-US" sz="900" dirty="0"/>
           </a:p>
@@ -7358,7 +7358,7 @@
                 <a:ea typeface="Pretendard" pitchFamily="34" charset="-122"/>
                 <a:cs typeface="Pretendard" pitchFamily="34" charset="-120"/>
               </a:rPr>
-              <a:t>짜깁기</a:t>
+              <a:t>이어 붙이기</a:t>
             </a:r>
             <a:endParaRPr lang="en-US" sz="900" dirty="0"/>
           </a:p>
@@ -7400,7 +7400,7 @@
                 <a:ea typeface="Pretendard" pitchFamily="34" charset="-122"/>
                 <a:cs typeface="Pretendard" pitchFamily="34" charset="-120"/>
               </a:rPr>
-              <a:t>묶은 뒤 내 문장으로 다시 씀</a:t>
+              <a:t>묶은 뒤 내 말로 다시 쓴다</a:t>
             </a:r>
             <a:endParaRPr lang="en-US" sz="1150" dirty="0"/>
           </a:p>
@@ -7531,7 +7531,7 @@
                 <a:ea typeface="Pretendard" pitchFamily="34" charset="-122"/>
                 <a:cs typeface="Pretendard" pitchFamily="34" charset="-120"/>
               </a:rPr>
-              <a:t>외국 논문을 번역해 내 글로</a:t>
+              <a:t>외국 논문을 번역해 내 글로 쓴다</a:t>
             </a:r>
             <a:endParaRPr lang="en-US" sz="1150" dirty="0"/>
           </a:p>
@@ -7612,7 +7612,7 @@
                 <a:ea typeface="Pretendard" pitchFamily="34" charset="-122"/>
                 <a:cs typeface="Pretendard" pitchFamily="34" charset="-120"/>
               </a:rPr>
-              <a:t>번역이어도 출처를 밝힘</a:t>
+              <a:t>번역이어도 출처를 밝힌다</a:t>
             </a:r>
             <a:endParaRPr lang="en-US" sz="1150" dirty="0"/>
           </a:p>
@@ -8603,7 +8603,7 @@
                 <a:ea typeface="Pretendard SemiBold" pitchFamily="34" charset="-122"/>
                 <a:cs typeface="Pretendard SemiBold" pitchFamily="34" charset="-120"/>
               </a:rPr>
-              <a:t>다섯 편을 두세 무리로 나눈다</a:t>
+              <a:t>다섯 편을 두세 묶음으로 나눈다</a:t>
             </a:r>
             <a:endParaRPr lang="en-US" sz="1450" dirty="0"/>
           </a:p>
@@ -8645,7 +8645,7 @@
                 <a:ea typeface="Pretendard" pitchFamily="34" charset="-122"/>
                 <a:cs typeface="Pretendard" pitchFamily="34" charset="-120"/>
               </a:rPr>
-              <a:t>기준은 무엇을 쟀는가입니다. 연도가 아닙니다.</a:t>
+              <a:t>무엇을 쟀는지로 나눕니다. 연도로 나누지 않습니다.</a:t>
             </a:r>
             <a:endParaRPr lang="en-US" sz="1150" dirty="0"/>
           </a:p>
@@ -8709,7 +8709,7 @@
                 <a:ea typeface="Pretendard SemiBold" pitchFamily="34" charset="-122"/>
                 <a:cs typeface="Pretendard SemiBold" pitchFamily="34" charset="-120"/>
               </a:rPr>
-              <a:t>무리마다 한 문장을 쓴다</a:t>
+              <a:t>묶음마다 한 문장을 쓴다</a:t>
             </a:r>
             <a:endParaRPr lang="en-US" sz="1450" dirty="0"/>
           </a:p>
@@ -8815,7 +8815,7 @@
                 <a:ea typeface="Pretendard SemiBold" pitchFamily="34" charset="-122"/>
                 <a:cs typeface="Pretendard SemiBold" pitchFamily="34" charset="-120"/>
               </a:rPr>
-              <a:t>빈 자리를 한 문장으로 쓴다</a:t>
+              <a:t>빠진 것을 한 문장으로 쓴다</a:t>
             </a:r>
             <a:endParaRPr lang="en-US" sz="1450" dirty="0"/>
           </a:p>
@@ -8963,7 +8963,7 @@
                 <a:ea typeface="Pretendard" pitchFamily="34" charset="-122"/>
                 <a:cs typeface="Pretendard" pitchFamily="34" charset="-120"/>
               </a:rPr>
-              <a:t>'그래서 이 연구는'으로 시작합니다. 이 문장이 없으면 절이 떠 있게 됩니다.</a:t>
+              <a:t>'그래서 이 연구는'으로 시작합니다. 이 문장이 없으면 선행연구를 왜 썼는지 알 수 없습니다.</a:t>
             </a:r>
             <a:endParaRPr lang="en-US" sz="1150" dirty="0"/>
           </a:p>
@@ -9030,7 +9030,7 @@
                 <a:ea typeface="Pretendard" pitchFamily="34" charset="-122"/>
                 <a:cs typeface="Pretendard" pitchFamily="34" charset="-120"/>
               </a:rPr>
-              <a:t>편수가 늘면 무리가 늘어날 뿐 구조는 같습니다. 지금 네 문장을 만들어 두십시오.</a:t>
+              <a:t>편수가 늘면 묶음이 늘어날 뿐 쓰는 법은 같습니다. 지금 네 문장을 만들어 두십시오.</a:t>
             </a:r>
             <a:endParaRPr lang="en-US" sz="1300" dirty="0"/>
           </a:p>
@@ -9559,7 +9559,7 @@
                 <a:ea typeface="Pretendard" pitchFamily="34" charset="-122"/>
                 <a:cs typeface="Pretendard" pitchFamily="34" charset="-120"/>
               </a:rPr>
-              <a:t>무리 1 — 몇 편이 무엇을 다뤘는가</a:t>
+              <a:t>묶음 1 — 몇 편이 무엇을 다뤘는지</a:t>
             </a:r>
             <a:endParaRPr lang="en-US" sz="1200" dirty="0"/>
           </a:p>
@@ -9583,7 +9583,7 @@
                 <a:ea typeface="Pretendard" pitchFamily="34" charset="-122"/>
                 <a:cs typeface="Pretendard" pitchFamily="34" charset="-120"/>
               </a:rPr>
-              <a:t>무리 2 — 몇 편이 무엇을 다뤘는가</a:t>
+              <a:t>묶음 2 — 몇 편이 무엇을 다뤘는지</a:t>
             </a:r>
             <a:endParaRPr lang="en-US" sz="1200" dirty="0"/>
           </a:p>
@@ -9607,7 +9607,7 @@
                 <a:ea typeface="Pretendard" pitchFamily="34" charset="-122"/>
                 <a:cs typeface="Pretendard" pitchFamily="34" charset="-120"/>
               </a:rPr>
-              <a:t>빈 자리 — 다섯 편 모두 다루지 않은 것</a:t>
+              <a:t>빠진 것 — 다섯 편 모두 다루지 않은 것</a:t>
             </a:r>
             <a:endParaRPr lang="en-US" sz="1200" dirty="0"/>
           </a:p>
@@ -9631,7 +9631,7 @@
                 <a:ea typeface="Pretendard" pitchFamily="34" charset="-122"/>
                 <a:cs typeface="Pretendard" pitchFamily="34" charset="-120"/>
               </a:rPr>
-              <a:t>내 자리 — 그래서 이 연구는 무엇을 보는가</a:t>
+              <a:t>내 연구 — 그래서 나는 무엇을 보는지</a:t>
             </a:r>
             <a:endParaRPr lang="en-US" sz="1200" dirty="0"/>
           </a:p>
@@ -10360,7 +10360,7 @@
                 <a:ea typeface="Pretendard" pitchFamily="34" charset="-122"/>
                 <a:cs typeface="Pretendard" pitchFamily="34" charset="-120"/>
               </a:rPr>
-              <a:t>다섯 편의 서지에 쪽수가 들어 있다</a:t>
+              <a:t>다섯 편의 논문 정보에 쪽수가 들어 있다</a:t>
             </a:r>
             <a:endParaRPr lang="en-US" sz="1200" dirty="0"/>
           </a:p>
@@ -10616,7 +10616,7 @@
                 <a:ea typeface="Pretendard" pitchFamily="34" charset="-122"/>
                 <a:cs typeface="Pretendard" pitchFamily="34" charset="-120"/>
               </a:rPr>
-              <a:t>다섯 편을 연도가 아니라 '무엇을 쟀는가'로 묶었다</a:t>
+              <a:t>다섯 편을 연도가 아니라 '무엇을 쟀는지'로 묶었다</a:t>
             </a:r>
             <a:endParaRPr lang="en-US" sz="1200" dirty="0"/>
           </a:p>
@@ -10744,7 +10744,7 @@
                 <a:ea typeface="Pretendard" pitchFamily="34" charset="-122"/>
                 <a:cs typeface="Pretendard" pitchFamily="34" charset="-120"/>
               </a:rPr>
-              <a:t>무리마다 몇 편인지 숫자를 넣었다</a:t>
+              <a:t>묶음마다 몇 편인지 숫자를 넣었다</a:t>
             </a:r>
             <a:endParaRPr lang="en-US" sz="1200" dirty="0"/>
           </a:p>
@@ -11820,7 +11820,7 @@
                 <a:ea typeface="Pretendard" pitchFamily="34" charset="-122"/>
                 <a:cs typeface="Pretendard" pitchFamily="34" charset="-120"/>
               </a:rPr>
-              <a:t>오늘 본 네 칸을 이어 한 문단으로 만듭니다. 무리 1 · 무리 2 · 빈 자리 · 내 자리. 열 줄 안쪽이면 됩니다. 길게 쓰는 것이 목적이 아닙니다.</a:t>
+              <a:t>오늘 본 네 칸을 이어 한 문단으로 만듭니다. 묶음 1 · 묶음 2 · 빠진 것 · 내 연구. 열 줄 안쪽이면 됩니다. 길게 쓰는 것이 목적이 아닙니다.</a:t>
             </a:r>
             <a:endParaRPr lang="en-US" sz="1100" dirty="0"/>
           </a:p>
@@ -12118,7 +12118,7 @@
                 <a:ea typeface="Pretendard SemiBold" pitchFamily="34" charset="-122"/>
                 <a:cs typeface="Pretendard SemiBold" pitchFamily="34" charset="-120"/>
               </a:rPr>
-              <a:t>정리표 보완</a:t>
+              <a:t>정리표 고치기</a:t>
             </a:r>
             <a:endParaRPr lang="en-US" sz="1400" dirty="0"/>
           </a:p>
@@ -12160,7 +12160,7 @@
                 <a:ea typeface="Pretendard" pitchFamily="34" charset="-122"/>
                 <a:cs typeface="Pretendard" pitchFamily="34" charset="-120"/>
               </a:rPr>
-              <a:t>2회차 여섯 칸에 쪽수 칸을 더합니다. 그리고 '무엇이 남았나' 칸을 편마다 한 줄로 채웁니다. 이 칸이 비어 있으면 빈 자리를 찾을 수 없습니다.</a:t>
+              <a:t>2회차 여섯 칸에 쪽수 칸을 더합니다. 그리고 '무엇이 남았나' 칸을 편마다 한 줄로 채웁니다. 이 칸이 비어 있으면 빠진 것을 찾을 수 없습니다.</a:t>
             </a:r>
             <a:endParaRPr lang="en-US" sz="1100" dirty="0"/>
           </a:p>
@@ -12618,7 +12618,7 @@
                 <a:ea typeface="Pretendard" pitchFamily="34" charset="-122"/>
                 <a:cs typeface="Pretendard" pitchFamily="34" charset="-120"/>
               </a:rPr>
-              <a:t>선행연구 한 문단 · 인용 문장 다섯 개 · 정리표 보완본</a:t>
+              <a:t>선행연구 한 문단 · 인용 문장 다섯 개 · 정리표 고친 것</a:t>
             </a:r>
             <a:endParaRPr lang="en-US" sz="1100" dirty="0"/>
           </a:p>
@@ -13063,7 +13063,7 @@
                 <a:ea typeface="Pretendard Light" pitchFamily="34" charset="-122"/>
                 <a:cs typeface="Pretendard Light" pitchFamily="34" charset="-120"/>
               </a:rPr>
-              <a:t>과제에 '관련 문헌을 근거로 검토한다'는 문장은 있고, 그 문헌은 없습니다. 찾은 논문이 글로 넘어오지 않은 것입니다. 이것은 성실함의 문제가 아니라 순서를 배운 적이 없는 문제입니다. 찾는 일은 검색으로 끝나지만, 쓰는 일은 한 편에서 무엇을 꺼내 어느 자리에 넣을지 정해야 끝납니다. 오늘 그 순서를 봅니다.</a:t>
+              <a:t>과제에 '관련 문헌을 근거로 검토한다'는 문장은 있고, 그 문헌은 없습니다. 찾은 논문이 글로 넘어오지 않은 것입니다. 이것은 성실함의 문제가 아니라 순서를 배운 적이 없는 문제입니다. 찾는 일은 검색으로 끝나지만, 쓰는 일은 한 편에서 무엇을 꺼내 어디에 넣을지 정해야 끝납니다. 오늘 그 순서를 봅니다.</a:t>
             </a:r>
             <a:endParaRPr lang="en-US" sz="1400" dirty="0"/>
           </a:p>
@@ -13354,7 +13354,7 @@
                 <a:ea typeface="Pretendard SemiBold" pitchFamily="34" charset="-122"/>
                 <a:cs typeface="Pretendard SemiBold" pitchFamily="34" charset="-120"/>
               </a:rPr>
-              <a:t>어디서 멈추는가</a:t>
+              <a:t>어디까지 가셨습니까</a:t>
             </a:r>
             <a:endParaRPr lang="en-US" sz="3000" dirty="0"/>
           </a:p>
@@ -13817,7 +13817,7 @@
                 <a:ea typeface="Pretendard" pitchFamily="34" charset="-122"/>
                 <a:cs typeface="Pretendard" pitchFamily="34" charset="-120"/>
               </a:rPr>
-              <a:t>읽고 정리표를 채웁니다. 서지 · 문제 · 방법 · 결과.</a:t>
+              <a:t>읽고 정리표를 채웁니다. 논문 정보 · 문제 · 방법 · 결과.</a:t>
             </a:r>
             <a:endParaRPr lang="en-US" sz="1150" dirty="0"/>
           </a:p>
@@ -14609,7 +14609,7 @@
                 <a:ea typeface="Pretendard SemiBold" pitchFamily="34" charset="-122"/>
                 <a:cs typeface="Pretendard SemiBold" pitchFamily="34" charset="-120"/>
               </a:rPr>
-              <a:t>한 편에서 무엇을 꺼내는가</a:t>
+              <a:t>논문에서 무엇을 꺼내나</a:t>
             </a:r>
             <a:endParaRPr lang="en-US" sz="4600" dirty="0"/>
           </a:p>
@@ -15218,7 +15218,7 @@
                 <a:ea typeface="Pretendard" pitchFamily="34" charset="-122"/>
                 <a:cs typeface="Pretendard" pitchFamily="34" charset="-120"/>
               </a:rPr>
-              <a:t>측정 도구나 분석 틀입니다. 내가 빌려 쓸 수 있는 자리입니다. 검증된 설문 문항은 그대로 가져다 쓸 수 있습니다.</a:t>
+              <a:t>그 사람이 어떤 방법으로 쟀는지입니다. 이건 빌려 쓸 수 있습니다. 여러 연구가 써 온 설문 문항이면 그대로 가져다 써도 됩니다.</a:t>
             </a:r>
             <a:endParaRPr lang="en-US" sz="1150" dirty="0"/>
           </a:p>
@@ -15324,7 +15324,7 @@
                 <a:ea typeface="Pretendard" pitchFamily="34" charset="-122"/>
                 <a:cs typeface="Pretendard" pitchFamily="34" charset="-120"/>
               </a:rPr>
-              <a:t>표본 수와 대상입니다. 내 연구의 규모를 정할 때 근거가 됩니다.</a:t>
+              <a:t>몇 개를 봤고 누구한테 물었는지입니다. 내 연구에서 몇 개를 볼지 정할 때 이걸 보고 정합니다.</a:t>
             </a:r>
             <a:endParaRPr lang="en-US" sz="1150" dirty="0"/>
           </a:p>
@@ -15497,7 +15497,7 @@
                 <a:ea typeface="Pretendard" pitchFamily="34" charset="-122"/>
                 <a:cs typeface="Pretendard" pitchFamily="34" charset="-120"/>
               </a:rPr>
-              <a:t>넷째가 제일 중요합니다. 남이 못 한 자리가 내 연구가 설 자리입니다.</a:t>
+              <a:t>넷째가 제일 중요합니다. 남이 못 한 것이 내가 할 것입니다.</a:t>
             </a:r>
             <a:endParaRPr lang="en-US" sz="1300" dirty="0"/>
           </a:p>
@@ -16050,7 +16050,7 @@
                 <a:ea typeface="Pretendard" pitchFamily="34" charset="-122"/>
                 <a:cs typeface="Pretendard" pitchFamily="34" charset="-120"/>
               </a:rPr>
-              <a:t>방법 — 방문객 40명에게 간판 사진을 보여 주고 읽는 시간을 측정</a:t>
+              <a:t>방법 — 방문객 40명에게 간판 사진을 보여 주고 읽는 데 걸린 시간을 쟀다</a:t>
             </a:r>
             <a:endParaRPr lang="en-US" sz="1200" dirty="0"/>
           </a:p>
@@ -16233,7 +16233,7 @@
                 <a:ea typeface="Pretendard" pitchFamily="34" charset="-122"/>
                 <a:cs typeface="Pretendard" pitchFamily="34" charset="-120"/>
               </a:rPr>
-              <a:t>물었나 — 글자 크기가 읽는 속도에 영향을 주는가</a:t>
+              <a:t>물었나 — 글자가 크면 더 빨리 읽나</a:t>
             </a:r>
             <a:endParaRPr lang="en-US" sz="1200" dirty="0"/>
           </a:p>
@@ -16257,7 +16257,7 @@
                 <a:ea typeface="Pretendard" pitchFamily="34" charset="-122"/>
                 <a:cs typeface="Pretendard" pitchFamily="34" charset="-120"/>
               </a:rPr>
-              <a:t>쟀나 — 사진을 보여 준 뒤 읽기까지 걸린 시간(초)</a:t>
+              <a:t>쟀나 — 사진을 보여 주고 읽을 때까지 걸린 시간</a:t>
             </a:r>
             <a:endParaRPr lang="en-US" sz="1200" dirty="0"/>
           </a:p>
@@ -16281,7 +16281,7 @@
                 <a:ea typeface="Pretendard" pitchFamily="34" charset="-122"/>
                 <a:cs typeface="Pretendard" pitchFamily="34" charset="-120"/>
               </a:rPr>
-              <a:t>봤나 — 방문객 40명. 사진 장수는 적혀 있지 않음</a:t>
+              <a:t>봤나 — 방문객 40명. 사진이 몇 장인지는 안 적혀 있음</a:t>
             </a:r>
             <a:endParaRPr lang="en-US" sz="1200" dirty="0"/>
           </a:p>
@@ -16305,7 +16305,7 @@
                 <a:ea typeface="Pretendard" pitchFamily="34" charset="-122"/>
                 <a:cs typeface="Pretendard" pitchFamily="34" charset="-120"/>
               </a:rPr>
-              <a:t>남았나 — 업종 구별. 내 연구가 설 자리</a:t>
+              <a:t>남았나 — 업종 구별. 내가 할 것</a:t>
             </a:r>
             <a:endParaRPr lang="en-US" sz="1200" dirty="0"/>
           </a:p>
@@ -16891,7 +16891,7 @@
                 <a:ea typeface="Pretendard" pitchFamily="34" charset="-122"/>
                 <a:cs typeface="Pretendard" pitchFamily="34" charset="-120"/>
               </a:rPr>
-              <a:t>원문 그대로</a:t>
+              <a:t>그대로 붙이기</a:t>
             </a:r>
             <a:endParaRPr lang="en-US" sz="900" dirty="0"/>
           </a:p>
@@ -16933,7 +16933,7 @@
                 <a:ea typeface="Pretendard" pitchFamily="34" charset="-122"/>
                 <a:cs typeface="Pretendard" pitchFamily="34" charset="-120"/>
               </a:rPr>
-              <a:t>논문 문장을 그대로 붙여 넣음</a:t>
+              <a:t>논문 문장을 그대로 옮겨 적는다</a:t>
             </a:r>
             <a:endParaRPr lang="en-US" sz="1150" dirty="0"/>
           </a:p>
@@ -16972,7 +16972,7 @@
                 <a:ea typeface="Pretendard" pitchFamily="34" charset="-122"/>
                 <a:cs typeface="Pretendard" pitchFamily="34" charset="-120"/>
               </a:rPr>
-              <a:t>원문 그대로</a:t>
+              <a:t>그대로 붙이기</a:t>
             </a:r>
             <a:endParaRPr lang="en-US" sz="900" dirty="0"/>
           </a:p>
@@ -17014,7 +17014,7 @@
                 <a:ea typeface="Pretendard" pitchFamily="34" charset="-122"/>
                 <a:cs typeface="Pretendard" pitchFamily="34" charset="-120"/>
               </a:rPr>
-              <a:t>내 말로 바꿔 쓰고 출처를 붙임</a:t>
+              <a:t>내 말로 바꿔 쓰고 출처를 적는다</a:t>
             </a:r>
             <a:endParaRPr lang="en-US" sz="1150" dirty="0"/>
           </a:p>
@@ -17315,7 +17315,7 @@
                 <a:ea typeface="Pretendard" pitchFamily="34" charset="-122"/>
                 <a:cs typeface="Pretendard" pitchFamily="34" charset="-120"/>
               </a:rPr>
-              <a:t>판단 없음</a:t>
+              <a:t>내 생각 없음</a:t>
             </a:r>
             <a:endParaRPr lang="en-US" sz="900" dirty="0"/>
           </a:p>
@@ -17357,7 +17357,7 @@
                 <a:ea typeface="Pretendard" pitchFamily="34" charset="-122"/>
                 <a:cs typeface="Pretendard" pitchFamily="34" charset="-120"/>
               </a:rPr>
-              <a:t>~라고 하였다 로 끝남</a:t>
+              <a:t>~라고 하였다 로 끝낸다</a:t>
             </a:r>
             <a:endParaRPr lang="en-US" sz="1150" dirty="0"/>
           </a:p>
@@ -17396,7 +17396,7 @@
                 <a:ea typeface="Pretendard" pitchFamily="34" charset="-122"/>
                 <a:cs typeface="Pretendard" pitchFamily="34" charset="-120"/>
               </a:rPr>
-              <a:t>판단 없음</a:t>
+              <a:t>내 생각 없음</a:t>
             </a:r>
             <a:endParaRPr lang="en-US" sz="900" dirty="0"/>
           </a:p>
@@ -17438,7 +17438,7 @@
                 <a:ea typeface="Pretendard" pitchFamily="34" charset="-122"/>
                 <a:cs typeface="Pretendard" pitchFamily="34" charset="-120"/>
               </a:rPr>
-              <a:t>~라고 했으나 업종은 보지 않았다</a:t>
+              <a:t>~라고 했으나 업종은 안 봤다</a:t>
             </a:r>
             <a:endParaRPr lang="en-US" sz="1150" dirty="0"/>
           </a:p>
@@ -17527,7 +17527,7 @@
                 <a:ea typeface="Pretendard" pitchFamily="34" charset="-122"/>
                 <a:cs typeface="Pretendard" pitchFamily="34" charset="-120"/>
               </a:rPr>
-              <a:t>쓸 자리 없음</a:t>
+              <a:t>어디 쓸지 없음</a:t>
             </a:r>
             <a:endParaRPr lang="en-US" sz="900" dirty="0"/>
           </a:p>
@@ -17569,7 +17569,7 @@
                 <a:ea typeface="Pretendard" pitchFamily="34" charset="-122"/>
                 <a:cs typeface="Pretendard" pitchFamily="34" charset="-120"/>
               </a:rPr>
-              <a:t>요약만 있고 쓰임이 없음</a:t>
+              <a:t>요약만 적고 끝낸다</a:t>
             </a:r>
             <a:endParaRPr lang="en-US" sz="1150" dirty="0"/>
           </a:p>
@@ -17608,7 +17608,7 @@
                 <a:ea typeface="Pretendard" pitchFamily="34" charset="-122"/>
                 <a:cs typeface="Pretendard" pitchFamily="34" charset="-120"/>
               </a:rPr>
-              <a:t>쓸 자리 없음</a:t>
+              <a:t>어디 쓸지 없음</a:t>
             </a:r>
             <a:endParaRPr lang="en-US" sz="900" dirty="0"/>
           </a:p>
@@ -17650,7 +17650,7 @@
                 <a:ea typeface="Pretendard" pitchFamily="34" charset="-122"/>
                 <a:cs typeface="Pretendard" pitchFamily="34" charset="-120"/>
               </a:rPr>
-              <a:t>이 측정 방법을 내 연구에 빌린다</a:t>
+              <a:t>이 방법을 내 연구에 빌린다</a:t>
             </a:r>
             <a:endParaRPr lang="en-US" sz="1150" dirty="0"/>
           </a:p>
@@ -18180,7 +18180,7 @@
                 <a:ea typeface="Pretendard SemiBold" pitchFamily="34" charset="-122"/>
                 <a:cs typeface="Pretendard SemiBold" pitchFamily="34" charset="-120"/>
               </a:rPr>
-              <a:t>꺼낸 것이 어느 절로 가는가</a:t>
+              <a:t>꺼낸 것을 어디에 쓰나</a:t>
             </a:r>
             <a:endParaRPr lang="en-US" sz="4600" dirty="0"/>
           </a:p>
@@ -18538,7 +18538,7 @@
                 <a:ea typeface="Pretendard SemiBold" pitchFamily="34" charset="-122"/>
                 <a:cs typeface="Pretendard SemiBold" pitchFamily="34" charset="-120"/>
               </a:rPr>
-              <a:t>네 가지가 들어가는 자리</a:t>
+              <a:t>네 가지를 쓰는 곳</a:t>
             </a:r>
             <a:endParaRPr lang="en-US" sz="3000" dirty="0"/>
           </a:p>
@@ -18577,7 +18577,7 @@
                 <a:ea typeface="Pretendard" pitchFamily="34" charset="-122"/>
                 <a:cs typeface="Pretendard" pitchFamily="34" charset="-120"/>
               </a:rPr>
-              <a:t>선행연구는 여섯 절 중 네 절에 들어갑니다.</a:t>
+              <a:t>선행연구는 선행연구 절에만 쓰지 않습니다. 네 군데에 들어갑니다.</a:t>
             </a:r>
             <a:endParaRPr lang="en-US" sz="1150" dirty="0"/>
           </a:p>
@@ -18744,7 +18744,7 @@
                 <a:ea typeface="Pretendard" pitchFamily="34" charset="-122"/>
                 <a:cs typeface="Pretendard" pitchFamily="34" charset="-120"/>
               </a:rPr>
-              <a:t>남이 못 한 자리에서 내 문제가 나옵니다</a:t>
+              <a:t>남이 못 한 것에서 내 문제가 나옵니다</a:t>
             </a:r>
             <a:endParaRPr lang="en-US" sz="1100" dirty="0"/>
           </a:p>
@@ -19078,7 +19078,7 @@
                 <a:ea typeface="Pretendard" pitchFamily="34" charset="-122"/>
                 <a:cs typeface="Pretendard" pitchFamily="34" charset="-120"/>
               </a:rPr>
-              <a:t>다섯 편을 한 문단으로 묶는 자리입니다</a:t>
+              <a:t>다섯 편을 한 문단으로 묶어 넣습니다</a:t>
             </a:r>
             <a:endParaRPr lang="en-US" sz="1100" dirty="0"/>
           </a:p>
@@ -19245,7 +19245,7 @@
                 <a:ea typeface="Pretendard" pitchFamily="34" charset="-122"/>
                 <a:cs typeface="Pretendard" pitchFamily="34" charset="-120"/>
               </a:rPr>
-              <a:t>측정과 규모를 여기서 빌립니다. 혼자 정하지 않습니다</a:t>
+              <a:t>재는 방법과 개수를 여기서 빌립니다. 혼자 정하지 않습니다</a:t>
             </a:r>
             <a:endParaRPr lang="en-US" sz="1100" dirty="0"/>
           </a:p>
